--- a/public/videos/repositories/wait-time-guide/wait-time-guide-tech-preview.pptx
+++ b/public/videos/repositories/wait-time-guide/wait-time-guide-tech-preview.pptx
@@ -134,7 +134,7 @@
           <p:cNvPr id="2" name="タイトル 1">
             <a:extLst>
               <a:ext uri="{FF2B5EF4-FFF2-40B4-BE49-F238E27FC236}">
-                <a16:creationId xmlns:a16="http://schemas.microsoft.com/office/drawing/2014/main" id="{66563711-2271-DA56-EDB2-6ACDF1405DF9}"/>
+                <a16:creationId xmlns:a16="http://schemas.microsoft.com/office/drawing/2014/main" id="{D5FDA440-84A7-702D-48DE-53D4A77EA0A2}"/>
               </a:ext>
             </a:extLst>
           </p:cNvPr>
@@ -171,7 +171,7 @@
           <p:cNvPr id="3" name="字幕 2">
             <a:extLst>
               <a:ext uri="{FF2B5EF4-FFF2-40B4-BE49-F238E27FC236}">
-                <a16:creationId xmlns:a16="http://schemas.microsoft.com/office/drawing/2014/main" id="{4844EC8F-9C52-5790-11D8-182638E70E3F}"/>
+                <a16:creationId xmlns:a16="http://schemas.microsoft.com/office/drawing/2014/main" id="{E2035767-5AFB-5466-EEEF-E60E0D87067B}"/>
               </a:ext>
             </a:extLst>
           </p:cNvPr>
@@ -241,7 +241,7 @@
           <p:cNvPr id="4" name="日付プレースホルダー 3">
             <a:extLst>
               <a:ext uri="{FF2B5EF4-FFF2-40B4-BE49-F238E27FC236}">
-                <a16:creationId xmlns:a16="http://schemas.microsoft.com/office/drawing/2014/main" id="{1AB943E0-BE7B-38A0-ECD2-F52FFA4B805D}"/>
+                <a16:creationId xmlns:a16="http://schemas.microsoft.com/office/drawing/2014/main" id="{64A5C4C6-988A-FB20-95AF-63B2E097EDAE}"/>
               </a:ext>
             </a:extLst>
           </p:cNvPr>
@@ -257,7 +257,7 @@
           <a:bodyPr/>
           <a:lstStyle/>
           <a:p>
-            <a:fld id="{1D001212-F287-4AE0-8F10-33415A4AAF93}" type="datetimeFigureOut">
+            <a:fld id="{B3EEE66C-04F2-4273-ABF6-AA1FDB25EA46}" type="datetimeFigureOut">
               <a:rPr kumimoji="1" lang="ja-JP" altLang="en-US" smtClean="0"/>
               <a:t>2026/7/30</a:t>
             </a:fld>
@@ -270,7 +270,7 @@
           <p:cNvPr id="5" name="フッター プレースホルダー 4">
             <a:extLst>
               <a:ext uri="{FF2B5EF4-FFF2-40B4-BE49-F238E27FC236}">
-                <a16:creationId xmlns:a16="http://schemas.microsoft.com/office/drawing/2014/main" id="{3D7C7060-36C7-54AE-7C52-74A0C43BEC45}"/>
+                <a16:creationId xmlns:a16="http://schemas.microsoft.com/office/drawing/2014/main" id="{2171CB43-E3F0-ACC6-BF4C-7B88FDAF946B}"/>
               </a:ext>
             </a:extLst>
           </p:cNvPr>
@@ -295,7 +295,7 @@
           <p:cNvPr id="6" name="スライド番号プレースホルダー 5">
             <a:extLst>
               <a:ext uri="{FF2B5EF4-FFF2-40B4-BE49-F238E27FC236}">
-                <a16:creationId xmlns:a16="http://schemas.microsoft.com/office/drawing/2014/main" id="{9AFE1F32-BF8E-F0D2-DB4D-19A408DE4289}"/>
+                <a16:creationId xmlns:a16="http://schemas.microsoft.com/office/drawing/2014/main" id="{96E3CCC8-A67D-A60A-4CED-0B6762CE4495}"/>
               </a:ext>
             </a:extLst>
           </p:cNvPr>
@@ -311,7 +311,7 @@
           <a:bodyPr/>
           <a:lstStyle/>
           <a:p>
-            <a:fld id="{6E13900F-BFE2-4005-B230-CC316F86FDEE}" type="slidenum">
+            <a:fld id="{81FD5278-7AEE-471E-A031-8249E2F16060}" type="slidenum">
               <a:rPr kumimoji="1" lang="ja-JP" altLang="en-US" smtClean="0"/>
               <a:t>‹#›</a:t>
             </a:fld>
@@ -322,7 +322,7 @@
     </p:spTree>
     <p:extLst>
       <p:ext uri="{BB962C8B-B14F-4D97-AF65-F5344CB8AC3E}">
-        <p14:creationId xmlns:p14="http://schemas.microsoft.com/office/powerpoint/2010/main" val="455658988"/>
+        <p14:creationId xmlns:p14="http://schemas.microsoft.com/office/powerpoint/2010/main" val="1802382585"/>
       </p:ext>
     </p:extLst>
   </p:cSld>
@@ -354,7 +354,7 @@
           <p:cNvPr id="2" name="タイトル 1">
             <a:extLst>
               <a:ext uri="{FF2B5EF4-FFF2-40B4-BE49-F238E27FC236}">
-                <a16:creationId xmlns:a16="http://schemas.microsoft.com/office/drawing/2014/main" id="{FC93D8B6-B5CF-A30A-57C5-C2E0DD5AFBB4}"/>
+                <a16:creationId xmlns:a16="http://schemas.microsoft.com/office/drawing/2014/main" id="{136A1616-3DD2-1289-E51F-93992457223C}"/>
               </a:ext>
             </a:extLst>
           </p:cNvPr>
@@ -382,7 +382,7 @@
           <p:cNvPr id="3" name="縦書きテキスト プレースホルダー 2">
             <a:extLst>
               <a:ext uri="{FF2B5EF4-FFF2-40B4-BE49-F238E27FC236}">
-                <a16:creationId xmlns:a16="http://schemas.microsoft.com/office/drawing/2014/main" id="{B79DEFB3-D0F8-00D8-ABC2-9247C96FAEA6}"/>
+                <a16:creationId xmlns:a16="http://schemas.microsoft.com/office/drawing/2014/main" id="{B70CC838-56BA-6014-F709-8F094DF8D1AE}"/>
               </a:ext>
             </a:extLst>
           </p:cNvPr>
@@ -471,7 +471,7 @@
           <p:cNvPr id="4" name="日付プレースホルダー 3">
             <a:extLst>
               <a:ext uri="{FF2B5EF4-FFF2-40B4-BE49-F238E27FC236}">
-                <a16:creationId xmlns:a16="http://schemas.microsoft.com/office/drawing/2014/main" id="{79C6A1FC-C2E4-EB17-813D-B8B2060DF257}"/>
+                <a16:creationId xmlns:a16="http://schemas.microsoft.com/office/drawing/2014/main" id="{1348EF42-84C5-AE97-01E5-99C38D3C3E50}"/>
               </a:ext>
             </a:extLst>
           </p:cNvPr>
@@ -487,7 +487,7 @@
           <a:bodyPr/>
           <a:lstStyle/>
           <a:p>
-            <a:fld id="{1D001212-F287-4AE0-8F10-33415A4AAF93}" type="datetimeFigureOut">
+            <a:fld id="{B3EEE66C-04F2-4273-ABF6-AA1FDB25EA46}" type="datetimeFigureOut">
               <a:rPr kumimoji="1" lang="ja-JP" altLang="en-US" smtClean="0"/>
               <a:t>2026/7/30</a:t>
             </a:fld>
@@ -500,7 +500,7 @@
           <p:cNvPr id="5" name="フッター プレースホルダー 4">
             <a:extLst>
               <a:ext uri="{FF2B5EF4-FFF2-40B4-BE49-F238E27FC236}">
-                <a16:creationId xmlns:a16="http://schemas.microsoft.com/office/drawing/2014/main" id="{710C0CE8-00BD-E998-F1BA-D94763249BE7}"/>
+                <a16:creationId xmlns:a16="http://schemas.microsoft.com/office/drawing/2014/main" id="{4EC47BE7-5A93-1363-CE0E-1414A575823E}"/>
               </a:ext>
             </a:extLst>
           </p:cNvPr>
@@ -525,7 +525,7 @@
           <p:cNvPr id="6" name="スライド番号プレースホルダー 5">
             <a:extLst>
               <a:ext uri="{FF2B5EF4-FFF2-40B4-BE49-F238E27FC236}">
-                <a16:creationId xmlns:a16="http://schemas.microsoft.com/office/drawing/2014/main" id="{0D1741EF-1742-06F5-969F-9BA53BD7206E}"/>
+                <a16:creationId xmlns:a16="http://schemas.microsoft.com/office/drawing/2014/main" id="{8BD164BC-47E3-190D-1450-1F0E0EA04B94}"/>
               </a:ext>
             </a:extLst>
           </p:cNvPr>
@@ -541,7 +541,7 @@
           <a:bodyPr/>
           <a:lstStyle/>
           <a:p>
-            <a:fld id="{6E13900F-BFE2-4005-B230-CC316F86FDEE}" type="slidenum">
+            <a:fld id="{81FD5278-7AEE-471E-A031-8249E2F16060}" type="slidenum">
               <a:rPr kumimoji="1" lang="ja-JP" altLang="en-US" smtClean="0"/>
               <a:t>‹#›</a:t>
             </a:fld>
@@ -552,7 +552,7 @@
     </p:spTree>
     <p:extLst>
       <p:ext uri="{BB962C8B-B14F-4D97-AF65-F5344CB8AC3E}">
-        <p14:creationId xmlns:p14="http://schemas.microsoft.com/office/powerpoint/2010/main" val="3367542781"/>
+        <p14:creationId xmlns:p14="http://schemas.microsoft.com/office/powerpoint/2010/main" val="3200912327"/>
       </p:ext>
     </p:extLst>
   </p:cSld>
@@ -584,7 +584,7 @@
           <p:cNvPr id="2" name="縦書きタイトル 1">
             <a:extLst>
               <a:ext uri="{FF2B5EF4-FFF2-40B4-BE49-F238E27FC236}">
-                <a16:creationId xmlns:a16="http://schemas.microsoft.com/office/drawing/2014/main" id="{8CE1AE02-EB4D-3ED3-0DB1-8D9E9DDFDC8B}"/>
+                <a16:creationId xmlns:a16="http://schemas.microsoft.com/office/drawing/2014/main" id="{1E862211-5E18-5CC7-A446-D6C1F424EEC9}"/>
               </a:ext>
             </a:extLst>
           </p:cNvPr>
@@ -617,7 +617,7 @@
           <p:cNvPr id="3" name="縦書きテキスト プレースホルダー 2">
             <a:extLst>
               <a:ext uri="{FF2B5EF4-FFF2-40B4-BE49-F238E27FC236}">
-                <a16:creationId xmlns:a16="http://schemas.microsoft.com/office/drawing/2014/main" id="{92789DDC-8698-F7F9-F3F2-9D5E77883C19}"/>
+                <a16:creationId xmlns:a16="http://schemas.microsoft.com/office/drawing/2014/main" id="{CCCD9F22-6205-9D97-0419-486B7BBB6DEA}"/>
               </a:ext>
             </a:extLst>
           </p:cNvPr>
@@ -711,7 +711,7 @@
           <p:cNvPr id="4" name="日付プレースホルダー 3">
             <a:extLst>
               <a:ext uri="{FF2B5EF4-FFF2-40B4-BE49-F238E27FC236}">
-                <a16:creationId xmlns:a16="http://schemas.microsoft.com/office/drawing/2014/main" id="{B8822C9E-E831-84A2-3728-82E40E2ABD9F}"/>
+                <a16:creationId xmlns:a16="http://schemas.microsoft.com/office/drawing/2014/main" id="{732F9790-510E-C4B8-0CA4-0EBC9AC3C7DB}"/>
               </a:ext>
             </a:extLst>
           </p:cNvPr>
@@ -727,7 +727,7 @@
           <a:bodyPr/>
           <a:lstStyle/>
           <a:p>
-            <a:fld id="{1D001212-F287-4AE0-8F10-33415A4AAF93}" type="datetimeFigureOut">
+            <a:fld id="{B3EEE66C-04F2-4273-ABF6-AA1FDB25EA46}" type="datetimeFigureOut">
               <a:rPr kumimoji="1" lang="ja-JP" altLang="en-US" smtClean="0"/>
               <a:t>2026/7/30</a:t>
             </a:fld>
@@ -740,7 +740,7 @@
           <p:cNvPr id="5" name="フッター プレースホルダー 4">
             <a:extLst>
               <a:ext uri="{FF2B5EF4-FFF2-40B4-BE49-F238E27FC236}">
-                <a16:creationId xmlns:a16="http://schemas.microsoft.com/office/drawing/2014/main" id="{BA93AF19-34D4-4705-8683-70F03722F234}"/>
+                <a16:creationId xmlns:a16="http://schemas.microsoft.com/office/drawing/2014/main" id="{1F0B50B7-DBE3-20AF-8D96-7B5122604B6C}"/>
               </a:ext>
             </a:extLst>
           </p:cNvPr>
@@ -765,7 +765,7 @@
           <p:cNvPr id="6" name="スライド番号プレースホルダー 5">
             <a:extLst>
               <a:ext uri="{FF2B5EF4-FFF2-40B4-BE49-F238E27FC236}">
-                <a16:creationId xmlns:a16="http://schemas.microsoft.com/office/drawing/2014/main" id="{2E7C3788-DE72-F3D4-B664-EF04BF3291E4}"/>
+                <a16:creationId xmlns:a16="http://schemas.microsoft.com/office/drawing/2014/main" id="{2391B9BA-BFB1-10A4-16AB-6DA33A54E73D}"/>
               </a:ext>
             </a:extLst>
           </p:cNvPr>
@@ -781,7 +781,7 @@
           <a:bodyPr/>
           <a:lstStyle/>
           <a:p>
-            <a:fld id="{6E13900F-BFE2-4005-B230-CC316F86FDEE}" type="slidenum">
+            <a:fld id="{81FD5278-7AEE-471E-A031-8249E2F16060}" type="slidenum">
               <a:rPr kumimoji="1" lang="ja-JP" altLang="en-US" smtClean="0"/>
               <a:t>‹#›</a:t>
             </a:fld>
@@ -792,7 +792,7 @@
     </p:spTree>
     <p:extLst>
       <p:ext uri="{BB962C8B-B14F-4D97-AF65-F5344CB8AC3E}">
-        <p14:creationId xmlns:p14="http://schemas.microsoft.com/office/powerpoint/2010/main" val="1994311202"/>
+        <p14:creationId xmlns:p14="http://schemas.microsoft.com/office/powerpoint/2010/main" val="2025779762"/>
       </p:ext>
     </p:extLst>
   </p:cSld>
@@ -824,7 +824,7 @@
           <p:cNvPr id="2" name="タイトル 1">
             <a:extLst>
               <a:ext uri="{FF2B5EF4-FFF2-40B4-BE49-F238E27FC236}">
-                <a16:creationId xmlns:a16="http://schemas.microsoft.com/office/drawing/2014/main" id="{01CB2BC9-A50A-1276-3B7C-F40464046258}"/>
+                <a16:creationId xmlns:a16="http://schemas.microsoft.com/office/drawing/2014/main" id="{0587583C-866F-A3EB-CE55-19276CA664BC}"/>
               </a:ext>
             </a:extLst>
           </p:cNvPr>
@@ -852,7 +852,7 @@
           <p:cNvPr id="3" name="コンテンツ プレースホルダー 2">
             <a:extLst>
               <a:ext uri="{FF2B5EF4-FFF2-40B4-BE49-F238E27FC236}">
-                <a16:creationId xmlns:a16="http://schemas.microsoft.com/office/drawing/2014/main" id="{D5AB00CF-A0B0-D45E-1F8E-8DE56161179E}"/>
+                <a16:creationId xmlns:a16="http://schemas.microsoft.com/office/drawing/2014/main" id="{8F1873BC-4465-1BF7-8AC6-A9B573A75C52}"/>
               </a:ext>
             </a:extLst>
           </p:cNvPr>
@@ -941,7 +941,7 @@
           <p:cNvPr id="4" name="日付プレースホルダー 3">
             <a:extLst>
               <a:ext uri="{FF2B5EF4-FFF2-40B4-BE49-F238E27FC236}">
-                <a16:creationId xmlns:a16="http://schemas.microsoft.com/office/drawing/2014/main" id="{A1F15DF6-D2FE-50AA-4CEA-E500A6E5FAA6}"/>
+                <a16:creationId xmlns:a16="http://schemas.microsoft.com/office/drawing/2014/main" id="{A49B9D1A-796E-DA41-C127-64E09E8508BE}"/>
               </a:ext>
             </a:extLst>
           </p:cNvPr>
@@ -957,7 +957,7 @@
           <a:bodyPr/>
           <a:lstStyle/>
           <a:p>
-            <a:fld id="{1D001212-F287-4AE0-8F10-33415A4AAF93}" type="datetimeFigureOut">
+            <a:fld id="{B3EEE66C-04F2-4273-ABF6-AA1FDB25EA46}" type="datetimeFigureOut">
               <a:rPr kumimoji="1" lang="ja-JP" altLang="en-US" smtClean="0"/>
               <a:t>2026/7/30</a:t>
             </a:fld>
@@ -970,7 +970,7 @@
           <p:cNvPr id="5" name="フッター プレースホルダー 4">
             <a:extLst>
               <a:ext uri="{FF2B5EF4-FFF2-40B4-BE49-F238E27FC236}">
-                <a16:creationId xmlns:a16="http://schemas.microsoft.com/office/drawing/2014/main" id="{C1764155-0DDC-0F4E-6503-E5B6B480BC47}"/>
+                <a16:creationId xmlns:a16="http://schemas.microsoft.com/office/drawing/2014/main" id="{7711E6F7-BB13-0A27-D2FD-715CAA2BAAC8}"/>
               </a:ext>
             </a:extLst>
           </p:cNvPr>
@@ -995,7 +995,7 @@
           <p:cNvPr id="6" name="スライド番号プレースホルダー 5">
             <a:extLst>
               <a:ext uri="{FF2B5EF4-FFF2-40B4-BE49-F238E27FC236}">
-                <a16:creationId xmlns:a16="http://schemas.microsoft.com/office/drawing/2014/main" id="{82A48CD2-AA5A-EA39-BA89-59917A15D019}"/>
+                <a16:creationId xmlns:a16="http://schemas.microsoft.com/office/drawing/2014/main" id="{DD206901-2692-2360-AB99-FEA6E488FCF3}"/>
               </a:ext>
             </a:extLst>
           </p:cNvPr>
@@ -1011,7 +1011,7 @@
           <a:bodyPr/>
           <a:lstStyle/>
           <a:p>
-            <a:fld id="{6E13900F-BFE2-4005-B230-CC316F86FDEE}" type="slidenum">
+            <a:fld id="{81FD5278-7AEE-471E-A031-8249E2F16060}" type="slidenum">
               <a:rPr kumimoji="1" lang="ja-JP" altLang="en-US" smtClean="0"/>
               <a:t>‹#›</a:t>
             </a:fld>
@@ -1022,7 +1022,7 @@
     </p:spTree>
     <p:extLst>
       <p:ext uri="{BB962C8B-B14F-4D97-AF65-F5344CB8AC3E}">
-        <p14:creationId xmlns:p14="http://schemas.microsoft.com/office/powerpoint/2010/main" val="1132018242"/>
+        <p14:creationId xmlns:p14="http://schemas.microsoft.com/office/powerpoint/2010/main" val="1919728921"/>
       </p:ext>
     </p:extLst>
   </p:cSld>
@@ -1054,7 +1054,7 @@
           <p:cNvPr id="2" name="タイトル 1">
             <a:extLst>
               <a:ext uri="{FF2B5EF4-FFF2-40B4-BE49-F238E27FC236}">
-                <a16:creationId xmlns:a16="http://schemas.microsoft.com/office/drawing/2014/main" id="{B75B6F9A-C513-A95A-0E55-3B37857B4608}"/>
+                <a16:creationId xmlns:a16="http://schemas.microsoft.com/office/drawing/2014/main" id="{6F40ED6D-0F22-D7BA-75D0-4272D915DE66}"/>
               </a:ext>
             </a:extLst>
           </p:cNvPr>
@@ -1091,7 +1091,7 @@
           <p:cNvPr id="3" name="テキスト プレースホルダー 2">
             <a:extLst>
               <a:ext uri="{FF2B5EF4-FFF2-40B4-BE49-F238E27FC236}">
-                <a16:creationId xmlns:a16="http://schemas.microsoft.com/office/drawing/2014/main" id="{69A62E0E-8E77-8CB2-9E79-89F95965FA9E}"/>
+                <a16:creationId xmlns:a16="http://schemas.microsoft.com/office/drawing/2014/main" id="{04DCF789-71A6-9F90-1517-19BC6F4C3DF3}"/>
               </a:ext>
             </a:extLst>
           </p:cNvPr>
@@ -1216,7 +1216,7 @@
           <p:cNvPr id="4" name="日付プレースホルダー 3">
             <a:extLst>
               <a:ext uri="{FF2B5EF4-FFF2-40B4-BE49-F238E27FC236}">
-                <a16:creationId xmlns:a16="http://schemas.microsoft.com/office/drawing/2014/main" id="{FE72CBC3-1D5F-1C9D-CA45-0F66B0F6190B}"/>
+                <a16:creationId xmlns:a16="http://schemas.microsoft.com/office/drawing/2014/main" id="{7481FD87-F49B-CB03-08E0-37131AD85E50}"/>
               </a:ext>
             </a:extLst>
           </p:cNvPr>
@@ -1232,7 +1232,7 @@
           <a:bodyPr/>
           <a:lstStyle/>
           <a:p>
-            <a:fld id="{1D001212-F287-4AE0-8F10-33415A4AAF93}" type="datetimeFigureOut">
+            <a:fld id="{B3EEE66C-04F2-4273-ABF6-AA1FDB25EA46}" type="datetimeFigureOut">
               <a:rPr kumimoji="1" lang="ja-JP" altLang="en-US" smtClean="0"/>
               <a:t>2026/7/30</a:t>
             </a:fld>
@@ -1245,7 +1245,7 @@
           <p:cNvPr id="5" name="フッター プレースホルダー 4">
             <a:extLst>
               <a:ext uri="{FF2B5EF4-FFF2-40B4-BE49-F238E27FC236}">
-                <a16:creationId xmlns:a16="http://schemas.microsoft.com/office/drawing/2014/main" id="{3BF13180-837A-024B-8275-C2FE8817248F}"/>
+                <a16:creationId xmlns:a16="http://schemas.microsoft.com/office/drawing/2014/main" id="{75B9C17A-25D0-BA1B-9174-D34BA408B17E}"/>
               </a:ext>
             </a:extLst>
           </p:cNvPr>
@@ -1270,7 +1270,7 @@
           <p:cNvPr id="6" name="スライド番号プレースホルダー 5">
             <a:extLst>
               <a:ext uri="{FF2B5EF4-FFF2-40B4-BE49-F238E27FC236}">
-                <a16:creationId xmlns:a16="http://schemas.microsoft.com/office/drawing/2014/main" id="{9BF2D69F-F412-ADA8-139B-C161FDD48E40}"/>
+                <a16:creationId xmlns:a16="http://schemas.microsoft.com/office/drawing/2014/main" id="{01DBF620-BA1A-E9CB-75F9-D3CE939794D5}"/>
               </a:ext>
             </a:extLst>
           </p:cNvPr>
@@ -1286,7 +1286,7 @@
           <a:bodyPr/>
           <a:lstStyle/>
           <a:p>
-            <a:fld id="{6E13900F-BFE2-4005-B230-CC316F86FDEE}" type="slidenum">
+            <a:fld id="{81FD5278-7AEE-471E-A031-8249E2F16060}" type="slidenum">
               <a:rPr kumimoji="1" lang="ja-JP" altLang="en-US" smtClean="0"/>
               <a:t>‹#›</a:t>
             </a:fld>
@@ -1297,7 +1297,7 @@
     </p:spTree>
     <p:extLst>
       <p:ext uri="{BB962C8B-B14F-4D97-AF65-F5344CB8AC3E}">
-        <p14:creationId xmlns:p14="http://schemas.microsoft.com/office/powerpoint/2010/main" val="140327125"/>
+        <p14:creationId xmlns:p14="http://schemas.microsoft.com/office/powerpoint/2010/main" val="1994878041"/>
       </p:ext>
     </p:extLst>
   </p:cSld>
@@ -1329,7 +1329,7 @@
           <p:cNvPr id="2" name="タイトル 1">
             <a:extLst>
               <a:ext uri="{FF2B5EF4-FFF2-40B4-BE49-F238E27FC236}">
-                <a16:creationId xmlns:a16="http://schemas.microsoft.com/office/drawing/2014/main" id="{26177AA5-DB0D-A9CD-C018-1C7F25DD6903}"/>
+                <a16:creationId xmlns:a16="http://schemas.microsoft.com/office/drawing/2014/main" id="{86F9C39A-CF0D-E2DF-5641-0C4ED36C2E90}"/>
               </a:ext>
             </a:extLst>
           </p:cNvPr>
@@ -1357,7 +1357,7 @@
           <p:cNvPr id="3" name="コンテンツ プレースホルダー 2">
             <a:extLst>
               <a:ext uri="{FF2B5EF4-FFF2-40B4-BE49-F238E27FC236}">
-                <a16:creationId xmlns:a16="http://schemas.microsoft.com/office/drawing/2014/main" id="{94021B9C-EF50-7E22-D0ED-22063F1745C3}"/>
+                <a16:creationId xmlns:a16="http://schemas.microsoft.com/office/drawing/2014/main" id="{A2930507-17F3-AC6B-4F3F-E23F4BD8BD7E}"/>
               </a:ext>
             </a:extLst>
           </p:cNvPr>
@@ -1451,7 +1451,7 @@
           <p:cNvPr id="4" name="コンテンツ プレースホルダー 3">
             <a:extLst>
               <a:ext uri="{FF2B5EF4-FFF2-40B4-BE49-F238E27FC236}">
-                <a16:creationId xmlns:a16="http://schemas.microsoft.com/office/drawing/2014/main" id="{69E250E5-2565-89D9-3A1D-0D34C2FFF699}"/>
+                <a16:creationId xmlns:a16="http://schemas.microsoft.com/office/drawing/2014/main" id="{5102C88B-9770-09D8-568E-CB394B39943E}"/>
               </a:ext>
             </a:extLst>
           </p:cNvPr>
@@ -1545,7 +1545,7 @@
           <p:cNvPr id="5" name="日付プレースホルダー 4">
             <a:extLst>
               <a:ext uri="{FF2B5EF4-FFF2-40B4-BE49-F238E27FC236}">
-                <a16:creationId xmlns:a16="http://schemas.microsoft.com/office/drawing/2014/main" id="{02D682CC-A115-892B-8DC1-39FD11BA4726}"/>
+                <a16:creationId xmlns:a16="http://schemas.microsoft.com/office/drawing/2014/main" id="{DA554FF0-E25B-F6AF-7B2A-5129E10E0471}"/>
               </a:ext>
             </a:extLst>
           </p:cNvPr>
@@ -1561,7 +1561,7 @@
           <a:bodyPr/>
           <a:lstStyle/>
           <a:p>
-            <a:fld id="{1D001212-F287-4AE0-8F10-33415A4AAF93}" type="datetimeFigureOut">
+            <a:fld id="{B3EEE66C-04F2-4273-ABF6-AA1FDB25EA46}" type="datetimeFigureOut">
               <a:rPr kumimoji="1" lang="ja-JP" altLang="en-US" smtClean="0"/>
               <a:t>2026/7/30</a:t>
             </a:fld>
@@ -1574,7 +1574,7 @@
           <p:cNvPr id="6" name="フッター プレースホルダー 5">
             <a:extLst>
               <a:ext uri="{FF2B5EF4-FFF2-40B4-BE49-F238E27FC236}">
-                <a16:creationId xmlns:a16="http://schemas.microsoft.com/office/drawing/2014/main" id="{CDEA6972-ABFB-4228-2DB4-DD8A80AEC347}"/>
+                <a16:creationId xmlns:a16="http://schemas.microsoft.com/office/drawing/2014/main" id="{0FFAD024-69D7-72AA-A196-B9EF01C24675}"/>
               </a:ext>
             </a:extLst>
           </p:cNvPr>
@@ -1599,7 +1599,7 @@
           <p:cNvPr id="7" name="スライド番号プレースホルダー 6">
             <a:extLst>
               <a:ext uri="{FF2B5EF4-FFF2-40B4-BE49-F238E27FC236}">
-                <a16:creationId xmlns:a16="http://schemas.microsoft.com/office/drawing/2014/main" id="{DC5F9BCC-96F0-C13B-F911-57ED1778C75E}"/>
+                <a16:creationId xmlns:a16="http://schemas.microsoft.com/office/drawing/2014/main" id="{C1BE7D99-72E5-302E-DA65-D4651AB3E00A}"/>
               </a:ext>
             </a:extLst>
           </p:cNvPr>
@@ -1615,7 +1615,7 @@
           <a:bodyPr/>
           <a:lstStyle/>
           <a:p>
-            <a:fld id="{6E13900F-BFE2-4005-B230-CC316F86FDEE}" type="slidenum">
+            <a:fld id="{81FD5278-7AEE-471E-A031-8249E2F16060}" type="slidenum">
               <a:rPr kumimoji="1" lang="ja-JP" altLang="en-US" smtClean="0"/>
               <a:t>‹#›</a:t>
             </a:fld>
@@ -1626,7 +1626,7 @@
     </p:spTree>
     <p:extLst>
       <p:ext uri="{BB962C8B-B14F-4D97-AF65-F5344CB8AC3E}">
-        <p14:creationId xmlns:p14="http://schemas.microsoft.com/office/powerpoint/2010/main" val="599332388"/>
+        <p14:creationId xmlns:p14="http://schemas.microsoft.com/office/powerpoint/2010/main" val="1414162800"/>
       </p:ext>
     </p:extLst>
   </p:cSld>
@@ -1658,7 +1658,7 @@
           <p:cNvPr id="2" name="タイトル 1">
             <a:extLst>
               <a:ext uri="{FF2B5EF4-FFF2-40B4-BE49-F238E27FC236}">
-                <a16:creationId xmlns:a16="http://schemas.microsoft.com/office/drawing/2014/main" id="{B4C60DCD-9256-1B70-CAFF-2B2AC8FE2FB1}"/>
+                <a16:creationId xmlns:a16="http://schemas.microsoft.com/office/drawing/2014/main" id="{1E5CE55E-BE36-E298-C7E3-39001CD6460C}"/>
               </a:ext>
             </a:extLst>
           </p:cNvPr>
@@ -1691,7 +1691,7 @@
           <p:cNvPr id="3" name="テキスト プレースホルダー 2">
             <a:extLst>
               <a:ext uri="{FF2B5EF4-FFF2-40B4-BE49-F238E27FC236}">
-                <a16:creationId xmlns:a16="http://schemas.microsoft.com/office/drawing/2014/main" id="{813D361C-CAC2-6B4B-7B50-FEDACC5A662B}"/>
+                <a16:creationId xmlns:a16="http://schemas.microsoft.com/office/drawing/2014/main" id="{9D3AF77F-D2D9-66C4-C041-41AC2794002B}"/>
               </a:ext>
             </a:extLst>
           </p:cNvPr>
@@ -1762,7 +1762,7 @@
           <p:cNvPr id="4" name="コンテンツ プレースホルダー 3">
             <a:extLst>
               <a:ext uri="{FF2B5EF4-FFF2-40B4-BE49-F238E27FC236}">
-                <a16:creationId xmlns:a16="http://schemas.microsoft.com/office/drawing/2014/main" id="{FBE8B17E-C4A9-060C-AC1B-C5D8229F23A5}"/>
+                <a16:creationId xmlns:a16="http://schemas.microsoft.com/office/drawing/2014/main" id="{1F52D16B-E58E-A5EF-790D-45A1DB937EF9}"/>
               </a:ext>
             </a:extLst>
           </p:cNvPr>
@@ -1856,7 +1856,7 @@
           <p:cNvPr id="5" name="テキスト プレースホルダー 4">
             <a:extLst>
               <a:ext uri="{FF2B5EF4-FFF2-40B4-BE49-F238E27FC236}">
-                <a16:creationId xmlns:a16="http://schemas.microsoft.com/office/drawing/2014/main" id="{C2A761AF-C0DF-E706-1239-05D15B884F70}"/>
+                <a16:creationId xmlns:a16="http://schemas.microsoft.com/office/drawing/2014/main" id="{0CBDECE5-B02C-39CC-DF23-7285620B0B5D}"/>
               </a:ext>
             </a:extLst>
           </p:cNvPr>
@@ -1927,7 +1927,7 @@
           <p:cNvPr id="6" name="コンテンツ プレースホルダー 5">
             <a:extLst>
               <a:ext uri="{FF2B5EF4-FFF2-40B4-BE49-F238E27FC236}">
-                <a16:creationId xmlns:a16="http://schemas.microsoft.com/office/drawing/2014/main" id="{87766CB3-92BE-EDB8-9253-CE29BB054C84}"/>
+                <a16:creationId xmlns:a16="http://schemas.microsoft.com/office/drawing/2014/main" id="{B1426B36-A554-8D42-C918-E50BE0D766A9}"/>
               </a:ext>
             </a:extLst>
           </p:cNvPr>
@@ -2021,7 +2021,7 @@
           <p:cNvPr id="7" name="日付プレースホルダー 6">
             <a:extLst>
               <a:ext uri="{FF2B5EF4-FFF2-40B4-BE49-F238E27FC236}">
-                <a16:creationId xmlns:a16="http://schemas.microsoft.com/office/drawing/2014/main" id="{3ACC1D91-0E22-DC15-01F6-ACE576A01A51}"/>
+                <a16:creationId xmlns:a16="http://schemas.microsoft.com/office/drawing/2014/main" id="{4970AA18-C306-D5F2-6519-F9FCD7FA0FB6}"/>
               </a:ext>
             </a:extLst>
           </p:cNvPr>
@@ -2037,7 +2037,7 @@
           <a:bodyPr/>
           <a:lstStyle/>
           <a:p>
-            <a:fld id="{1D001212-F287-4AE0-8F10-33415A4AAF93}" type="datetimeFigureOut">
+            <a:fld id="{B3EEE66C-04F2-4273-ABF6-AA1FDB25EA46}" type="datetimeFigureOut">
               <a:rPr kumimoji="1" lang="ja-JP" altLang="en-US" smtClean="0"/>
               <a:t>2026/7/30</a:t>
             </a:fld>
@@ -2050,7 +2050,7 @@
           <p:cNvPr id="8" name="フッター プレースホルダー 7">
             <a:extLst>
               <a:ext uri="{FF2B5EF4-FFF2-40B4-BE49-F238E27FC236}">
-                <a16:creationId xmlns:a16="http://schemas.microsoft.com/office/drawing/2014/main" id="{208D9665-BE0A-B812-B649-7FC823E4FB53}"/>
+                <a16:creationId xmlns:a16="http://schemas.microsoft.com/office/drawing/2014/main" id="{085DCAE2-A197-7756-CCB5-6A9916C83750}"/>
               </a:ext>
             </a:extLst>
           </p:cNvPr>
@@ -2075,7 +2075,7 @@
           <p:cNvPr id="9" name="スライド番号プレースホルダー 8">
             <a:extLst>
               <a:ext uri="{FF2B5EF4-FFF2-40B4-BE49-F238E27FC236}">
-                <a16:creationId xmlns:a16="http://schemas.microsoft.com/office/drawing/2014/main" id="{02007A38-DAE8-703C-A7BF-15D2CE752D22}"/>
+                <a16:creationId xmlns:a16="http://schemas.microsoft.com/office/drawing/2014/main" id="{EB38B258-A257-6436-010E-C41B2C77E7A3}"/>
               </a:ext>
             </a:extLst>
           </p:cNvPr>
@@ -2091,7 +2091,7 @@
           <a:bodyPr/>
           <a:lstStyle/>
           <a:p>
-            <a:fld id="{6E13900F-BFE2-4005-B230-CC316F86FDEE}" type="slidenum">
+            <a:fld id="{81FD5278-7AEE-471E-A031-8249E2F16060}" type="slidenum">
               <a:rPr kumimoji="1" lang="ja-JP" altLang="en-US" smtClean="0"/>
               <a:t>‹#›</a:t>
             </a:fld>
@@ -2102,7 +2102,7 @@
     </p:spTree>
     <p:extLst>
       <p:ext uri="{BB962C8B-B14F-4D97-AF65-F5344CB8AC3E}">
-        <p14:creationId xmlns:p14="http://schemas.microsoft.com/office/powerpoint/2010/main" val="2456230982"/>
+        <p14:creationId xmlns:p14="http://schemas.microsoft.com/office/powerpoint/2010/main" val="4063177414"/>
       </p:ext>
     </p:extLst>
   </p:cSld>
@@ -2134,7 +2134,7 @@
           <p:cNvPr id="2" name="タイトル 1">
             <a:extLst>
               <a:ext uri="{FF2B5EF4-FFF2-40B4-BE49-F238E27FC236}">
-                <a16:creationId xmlns:a16="http://schemas.microsoft.com/office/drawing/2014/main" id="{2F914B57-0498-169E-FC8A-06AB2B772BF3}"/>
+                <a16:creationId xmlns:a16="http://schemas.microsoft.com/office/drawing/2014/main" id="{A6E3ED83-2DBD-9AFC-4450-78D8C7AB37D8}"/>
               </a:ext>
             </a:extLst>
           </p:cNvPr>
@@ -2162,7 +2162,7 @@
           <p:cNvPr id="3" name="日付プレースホルダー 2">
             <a:extLst>
               <a:ext uri="{FF2B5EF4-FFF2-40B4-BE49-F238E27FC236}">
-                <a16:creationId xmlns:a16="http://schemas.microsoft.com/office/drawing/2014/main" id="{1EE2FA3E-DE6E-ADBB-CE63-7D8AB8B06062}"/>
+                <a16:creationId xmlns:a16="http://schemas.microsoft.com/office/drawing/2014/main" id="{FE82016E-ADD7-C343-E343-982AA3F30F2C}"/>
               </a:ext>
             </a:extLst>
           </p:cNvPr>
@@ -2178,7 +2178,7 @@
           <a:bodyPr/>
           <a:lstStyle/>
           <a:p>
-            <a:fld id="{1D001212-F287-4AE0-8F10-33415A4AAF93}" type="datetimeFigureOut">
+            <a:fld id="{B3EEE66C-04F2-4273-ABF6-AA1FDB25EA46}" type="datetimeFigureOut">
               <a:rPr kumimoji="1" lang="ja-JP" altLang="en-US" smtClean="0"/>
               <a:t>2026/7/30</a:t>
             </a:fld>
@@ -2191,7 +2191,7 @@
           <p:cNvPr id="4" name="フッター プレースホルダー 3">
             <a:extLst>
               <a:ext uri="{FF2B5EF4-FFF2-40B4-BE49-F238E27FC236}">
-                <a16:creationId xmlns:a16="http://schemas.microsoft.com/office/drawing/2014/main" id="{484129C5-2351-48CF-1AE9-A86CC2E82430}"/>
+                <a16:creationId xmlns:a16="http://schemas.microsoft.com/office/drawing/2014/main" id="{A06755AD-0BE9-49D5-C742-3915FDDB44DE}"/>
               </a:ext>
             </a:extLst>
           </p:cNvPr>
@@ -2216,7 +2216,7 @@
           <p:cNvPr id="5" name="スライド番号プレースホルダー 4">
             <a:extLst>
               <a:ext uri="{FF2B5EF4-FFF2-40B4-BE49-F238E27FC236}">
-                <a16:creationId xmlns:a16="http://schemas.microsoft.com/office/drawing/2014/main" id="{E10A2471-9074-1DCB-A3C0-854F9244A556}"/>
+                <a16:creationId xmlns:a16="http://schemas.microsoft.com/office/drawing/2014/main" id="{A709E3B5-32FA-9068-60AC-0FA35294B78D}"/>
               </a:ext>
             </a:extLst>
           </p:cNvPr>
@@ -2232,7 +2232,7 @@
           <a:bodyPr/>
           <a:lstStyle/>
           <a:p>
-            <a:fld id="{6E13900F-BFE2-4005-B230-CC316F86FDEE}" type="slidenum">
+            <a:fld id="{81FD5278-7AEE-471E-A031-8249E2F16060}" type="slidenum">
               <a:rPr kumimoji="1" lang="ja-JP" altLang="en-US" smtClean="0"/>
               <a:t>‹#›</a:t>
             </a:fld>
@@ -2243,7 +2243,7 @@
     </p:spTree>
     <p:extLst>
       <p:ext uri="{BB962C8B-B14F-4D97-AF65-F5344CB8AC3E}">
-        <p14:creationId xmlns:p14="http://schemas.microsoft.com/office/powerpoint/2010/main" val="1634308296"/>
+        <p14:creationId xmlns:p14="http://schemas.microsoft.com/office/powerpoint/2010/main" val="3383038996"/>
       </p:ext>
     </p:extLst>
   </p:cSld>
@@ -2275,7 +2275,7 @@
           <p:cNvPr id="2" name="日付プレースホルダー 1">
             <a:extLst>
               <a:ext uri="{FF2B5EF4-FFF2-40B4-BE49-F238E27FC236}">
-                <a16:creationId xmlns:a16="http://schemas.microsoft.com/office/drawing/2014/main" id="{C14267A1-ECAF-E36A-3C87-961935F8FB77}"/>
+                <a16:creationId xmlns:a16="http://schemas.microsoft.com/office/drawing/2014/main" id="{71EDE819-F686-9CB9-CD19-DBA6421876B3}"/>
               </a:ext>
             </a:extLst>
           </p:cNvPr>
@@ -2291,7 +2291,7 @@
           <a:bodyPr/>
           <a:lstStyle/>
           <a:p>
-            <a:fld id="{1D001212-F287-4AE0-8F10-33415A4AAF93}" type="datetimeFigureOut">
+            <a:fld id="{B3EEE66C-04F2-4273-ABF6-AA1FDB25EA46}" type="datetimeFigureOut">
               <a:rPr kumimoji="1" lang="ja-JP" altLang="en-US" smtClean="0"/>
               <a:t>2026/7/30</a:t>
             </a:fld>
@@ -2304,7 +2304,7 @@
           <p:cNvPr id="3" name="フッター プレースホルダー 2">
             <a:extLst>
               <a:ext uri="{FF2B5EF4-FFF2-40B4-BE49-F238E27FC236}">
-                <a16:creationId xmlns:a16="http://schemas.microsoft.com/office/drawing/2014/main" id="{C87EE281-CA81-547B-7C97-B6F5620EE288}"/>
+                <a16:creationId xmlns:a16="http://schemas.microsoft.com/office/drawing/2014/main" id="{62F8885F-8EAD-1C61-76EE-7E6D898AE06D}"/>
               </a:ext>
             </a:extLst>
           </p:cNvPr>
@@ -2329,7 +2329,7 @@
           <p:cNvPr id="4" name="スライド番号プレースホルダー 3">
             <a:extLst>
               <a:ext uri="{FF2B5EF4-FFF2-40B4-BE49-F238E27FC236}">
-                <a16:creationId xmlns:a16="http://schemas.microsoft.com/office/drawing/2014/main" id="{E2BBE3E4-326A-B8E1-0B10-49B4BF48023B}"/>
+                <a16:creationId xmlns:a16="http://schemas.microsoft.com/office/drawing/2014/main" id="{44172135-7BBA-5CE2-E83C-E2C9399D1039}"/>
               </a:ext>
             </a:extLst>
           </p:cNvPr>
@@ -2345,7 +2345,7 @@
           <a:bodyPr/>
           <a:lstStyle/>
           <a:p>
-            <a:fld id="{6E13900F-BFE2-4005-B230-CC316F86FDEE}" type="slidenum">
+            <a:fld id="{81FD5278-7AEE-471E-A031-8249E2F16060}" type="slidenum">
               <a:rPr kumimoji="1" lang="ja-JP" altLang="en-US" smtClean="0"/>
               <a:t>‹#›</a:t>
             </a:fld>
@@ -2356,7 +2356,7 @@
     </p:spTree>
     <p:extLst>
       <p:ext uri="{BB962C8B-B14F-4D97-AF65-F5344CB8AC3E}">
-        <p14:creationId xmlns:p14="http://schemas.microsoft.com/office/powerpoint/2010/main" val="894337087"/>
+        <p14:creationId xmlns:p14="http://schemas.microsoft.com/office/powerpoint/2010/main" val="372603711"/>
       </p:ext>
     </p:extLst>
   </p:cSld>
@@ -2388,7 +2388,7 @@
           <p:cNvPr id="2" name="タイトル 1">
             <a:extLst>
               <a:ext uri="{FF2B5EF4-FFF2-40B4-BE49-F238E27FC236}">
-                <a16:creationId xmlns:a16="http://schemas.microsoft.com/office/drawing/2014/main" id="{D2FBB72E-22D4-F254-D524-A32C76CC57DC}"/>
+                <a16:creationId xmlns:a16="http://schemas.microsoft.com/office/drawing/2014/main" id="{36E31F74-48C5-5722-C293-20FB35ECE3D2}"/>
               </a:ext>
             </a:extLst>
           </p:cNvPr>
@@ -2425,7 +2425,7 @@
           <p:cNvPr id="3" name="コンテンツ プレースホルダー 2">
             <a:extLst>
               <a:ext uri="{FF2B5EF4-FFF2-40B4-BE49-F238E27FC236}">
-                <a16:creationId xmlns:a16="http://schemas.microsoft.com/office/drawing/2014/main" id="{44998C57-9977-CF2E-74AE-2F55953C8693}"/>
+                <a16:creationId xmlns:a16="http://schemas.microsoft.com/office/drawing/2014/main" id="{D70B6EE6-6F89-002E-D86D-6EBBD7E6C27E}"/>
               </a:ext>
             </a:extLst>
           </p:cNvPr>
@@ -2547,7 +2547,7 @@
           <p:cNvPr id="4" name="テキスト プレースホルダー 3">
             <a:extLst>
               <a:ext uri="{FF2B5EF4-FFF2-40B4-BE49-F238E27FC236}">
-                <a16:creationId xmlns:a16="http://schemas.microsoft.com/office/drawing/2014/main" id="{98834BE3-D112-8A36-DE68-CA9DF93C6188}"/>
+                <a16:creationId xmlns:a16="http://schemas.microsoft.com/office/drawing/2014/main" id="{F67103A7-3C0B-23AB-0944-9F810A6BFA2B}"/>
               </a:ext>
             </a:extLst>
           </p:cNvPr>
@@ -2618,7 +2618,7 @@
           <p:cNvPr id="5" name="日付プレースホルダー 4">
             <a:extLst>
               <a:ext uri="{FF2B5EF4-FFF2-40B4-BE49-F238E27FC236}">
-                <a16:creationId xmlns:a16="http://schemas.microsoft.com/office/drawing/2014/main" id="{E758144A-06A9-BBBF-D337-5E26DC7A3FEC}"/>
+                <a16:creationId xmlns:a16="http://schemas.microsoft.com/office/drawing/2014/main" id="{902936B5-94F5-2FE7-1CD4-1ABFE2700384}"/>
               </a:ext>
             </a:extLst>
           </p:cNvPr>
@@ -2634,7 +2634,7 @@
           <a:bodyPr/>
           <a:lstStyle/>
           <a:p>
-            <a:fld id="{1D001212-F287-4AE0-8F10-33415A4AAF93}" type="datetimeFigureOut">
+            <a:fld id="{B3EEE66C-04F2-4273-ABF6-AA1FDB25EA46}" type="datetimeFigureOut">
               <a:rPr kumimoji="1" lang="ja-JP" altLang="en-US" smtClean="0"/>
               <a:t>2026/7/30</a:t>
             </a:fld>
@@ -2647,7 +2647,7 @@
           <p:cNvPr id="6" name="フッター プレースホルダー 5">
             <a:extLst>
               <a:ext uri="{FF2B5EF4-FFF2-40B4-BE49-F238E27FC236}">
-                <a16:creationId xmlns:a16="http://schemas.microsoft.com/office/drawing/2014/main" id="{37E835FC-C3AA-CF90-B415-81DBFE800A2A}"/>
+                <a16:creationId xmlns:a16="http://schemas.microsoft.com/office/drawing/2014/main" id="{70892845-E341-B6D4-6678-E4676A902E91}"/>
               </a:ext>
             </a:extLst>
           </p:cNvPr>
@@ -2672,7 +2672,7 @@
           <p:cNvPr id="7" name="スライド番号プレースホルダー 6">
             <a:extLst>
               <a:ext uri="{FF2B5EF4-FFF2-40B4-BE49-F238E27FC236}">
-                <a16:creationId xmlns:a16="http://schemas.microsoft.com/office/drawing/2014/main" id="{A823E72C-CF20-6D42-8D92-D28EB3DCB842}"/>
+                <a16:creationId xmlns:a16="http://schemas.microsoft.com/office/drawing/2014/main" id="{38B3FB44-BEAB-C937-0D1E-A7F5F2AABAA5}"/>
               </a:ext>
             </a:extLst>
           </p:cNvPr>
@@ -2688,7 +2688,7 @@
           <a:bodyPr/>
           <a:lstStyle/>
           <a:p>
-            <a:fld id="{6E13900F-BFE2-4005-B230-CC316F86FDEE}" type="slidenum">
+            <a:fld id="{81FD5278-7AEE-471E-A031-8249E2F16060}" type="slidenum">
               <a:rPr kumimoji="1" lang="ja-JP" altLang="en-US" smtClean="0"/>
               <a:t>‹#›</a:t>
             </a:fld>
@@ -2699,7 +2699,7 @@
     </p:spTree>
     <p:extLst>
       <p:ext uri="{BB962C8B-B14F-4D97-AF65-F5344CB8AC3E}">
-        <p14:creationId xmlns:p14="http://schemas.microsoft.com/office/powerpoint/2010/main" val="1303103804"/>
+        <p14:creationId xmlns:p14="http://schemas.microsoft.com/office/powerpoint/2010/main" val="3636914229"/>
       </p:ext>
     </p:extLst>
   </p:cSld>
@@ -2731,7 +2731,7 @@
           <p:cNvPr id="2" name="タイトル 1">
             <a:extLst>
               <a:ext uri="{FF2B5EF4-FFF2-40B4-BE49-F238E27FC236}">
-                <a16:creationId xmlns:a16="http://schemas.microsoft.com/office/drawing/2014/main" id="{C17EA2A3-38AE-F8D6-B777-3D5A39A92587}"/>
+                <a16:creationId xmlns:a16="http://schemas.microsoft.com/office/drawing/2014/main" id="{9AB960F4-F2A3-6043-74CF-9EF03378797E}"/>
               </a:ext>
             </a:extLst>
           </p:cNvPr>
@@ -2768,7 +2768,7 @@
           <p:cNvPr id="3" name="図プレースホルダー 2">
             <a:extLst>
               <a:ext uri="{FF2B5EF4-FFF2-40B4-BE49-F238E27FC236}">
-                <a16:creationId xmlns:a16="http://schemas.microsoft.com/office/drawing/2014/main" id="{86528AC1-E56D-3829-4521-95EEE4B188F5}"/>
+                <a16:creationId xmlns:a16="http://schemas.microsoft.com/office/drawing/2014/main" id="{C84EC190-F048-2794-5B69-3B4C7BCC5BC3}"/>
               </a:ext>
             </a:extLst>
           </p:cNvPr>
@@ -2835,7 +2835,7 @@
           <p:cNvPr id="4" name="テキスト プレースホルダー 3">
             <a:extLst>
               <a:ext uri="{FF2B5EF4-FFF2-40B4-BE49-F238E27FC236}">
-                <a16:creationId xmlns:a16="http://schemas.microsoft.com/office/drawing/2014/main" id="{F07856A7-5FC8-F43A-6C77-0A6B465FA484}"/>
+                <a16:creationId xmlns:a16="http://schemas.microsoft.com/office/drawing/2014/main" id="{CABA085E-34DB-5D72-B5BF-68E063A103ED}"/>
               </a:ext>
             </a:extLst>
           </p:cNvPr>
@@ -2906,7 +2906,7 @@
           <p:cNvPr id="5" name="日付プレースホルダー 4">
             <a:extLst>
               <a:ext uri="{FF2B5EF4-FFF2-40B4-BE49-F238E27FC236}">
-                <a16:creationId xmlns:a16="http://schemas.microsoft.com/office/drawing/2014/main" id="{243DBA5A-4CE5-EE3D-A69D-5F6E47048364}"/>
+                <a16:creationId xmlns:a16="http://schemas.microsoft.com/office/drawing/2014/main" id="{5C48F098-A2B3-CA39-6FF4-E4637E2EE49B}"/>
               </a:ext>
             </a:extLst>
           </p:cNvPr>
@@ -2922,7 +2922,7 @@
           <a:bodyPr/>
           <a:lstStyle/>
           <a:p>
-            <a:fld id="{1D001212-F287-4AE0-8F10-33415A4AAF93}" type="datetimeFigureOut">
+            <a:fld id="{B3EEE66C-04F2-4273-ABF6-AA1FDB25EA46}" type="datetimeFigureOut">
               <a:rPr kumimoji="1" lang="ja-JP" altLang="en-US" smtClean="0"/>
               <a:t>2026/7/30</a:t>
             </a:fld>
@@ -2935,7 +2935,7 @@
           <p:cNvPr id="6" name="フッター プレースホルダー 5">
             <a:extLst>
               <a:ext uri="{FF2B5EF4-FFF2-40B4-BE49-F238E27FC236}">
-                <a16:creationId xmlns:a16="http://schemas.microsoft.com/office/drawing/2014/main" id="{2D74D861-26F2-0951-8514-E4C1F8824FD2}"/>
+                <a16:creationId xmlns:a16="http://schemas.microsoft.com/office/drawing/2014/main" id="{649ACC43-E1A2-C5F7-8E86-AFA579D5AED5}"/>
               </a:ext>
             </a:extLst>
           </p:cNvPr>
@@ -2960,7 +2960,7 @@
           <p:cNvPr id="7" name="スライド番号プレースホルダー 6">
             <a:extLst>
               <a:ext uri="{FF2B5EF4-FFF2-40B4-BE49-F238E27FC236}">
-                <a16:creationId xmlns:a16="http://schemas.microsoft.com/office/drawing/2014/main" id="{8B843449-1747-3AEE-DC33-93E53EA3B0AF}"/>
+                <a16:creationId xmlns:a16="http://schemas.microsoft.com/office/drawing/2014/main" id="{25350834-F65D-6186-0B8E-494116DA2DF8}"/>
               </a:ext>
             </a:extLst>
           </p:cNvPr>
@@ -2976,7 +2976,7 @@
           <a:bodyPr/>
           <a:lstStyle/>
           <a:p>
-            <a:fld id="{6E13900F-BFE2-4005-B230-CC316F86FDEE}" type="slidenum">
+            <a:fld id="{81FD5278-7AEE-471E-A031-8249E2F16060}" type="slidenum">
               <a:rPr kumimoji="1" lang="ja-JP" altLang="en-US" smtClean="0"/>
               <a:t>‹#›</a:t>
             </a:fld>
@@ -2987,7 +2987,7 @@
     </p:spTree>
     <p:extLst>
       <p:ext uri="{BB962C8B-B14F-4D97-AF65-F5344CB8AC3E}">
-        <p14:creationId xmlns:p14="http://schemas.microsoft.com/office/powerpoint/2010/main" val="1815352130"/>
+        <p14:creationId xmlns:p14="http://schemas.microsoft.com/office/powerpoint/2010/main" val="3428383558"/>
       </p:ext>
     </p:extLst>
   </p:cSld>
@@ -3024,7 +3024,7 @@
           <p:cNvPr id="2" name="タイトル プレースホルダー 1">
             <a:extLst>
               <a:ext uri="{FF2B5EF4-FFF2-40B4-BE49-F238E27FC236}">
-                <a16:creationId xmlns:a16="http://schemas.microsoft.com/office/drawing/2014/main" id="{2E43A3A4-80E5-E208-DF63-6ABD38D1C338}"/>
+                <a16:creationId xmlns:a16="http://schemas.microsoft.com/office/drawing/2014/main" id="{EEE1E64D-78C1-BD4E-8760-32B9D6892AFC}"/>
               </a:ext>
             </a:extLst>
           </p:cNvPr>
@@ -3062,7 +3062,7 @@
           <p:cNvPr id="3" name="テキスト プレースホルダー 2">
             <a:extLst>
               <a:ext uri="{FF2B5EF4-FFF2-40B4-BE49-F238E27FC236}">
-                <a16:creationId xmlns:a16="http://schemas.microsoft.com/office/drawing/2014/main" id="{56562699-7BD0-BD59-4387-14E8469936C5}"/>
+                <a16:creationId xmlns:a16="http://schemas.microsoft.com/office/drawing/2014/main" id="{D596D737-A4C9-CB8C-F999-973A57BC00D8}"/>
               </a:ext>
             </a:extLst>
           </p:cNvPr>
@@ -3161,7 +3161,7 @@
           <p:cNvPr id="4" name="日付プレースホルダー 3">
             <a:extLst>
               <a:ext uri="{FF2B5EF4-FFF2-40B4-BE49-F238E27FC236}">
-                <a16:creationId xmlns:a16="http://schemas.microsoft.com/office/drawing/2014/main" id="{7B820BEB-65E6-10A5-9CFC-1FB013B383E7}"/>
+                <a16:creationId xmlns:a16="http://schemas.microsoft.com/office/drawing/2014/main" id="{260C3A94-B809-47DC-AE60-595D4531BB48}"/>
               </a:ext>
             </a:extLst>
           </p:cNvPr>
@@ -3195,7 +3195,7 @@
             </a:lvl1pPr>
           </a:lstStyle>
           <a:p>
-            <a:fld id="{1D001212-F287-4AE0-8F10-33415A4AAF93}" type="datetimeFigureOut">
+            <a:fld id="{B3EEE66C-04F2-4273-ABF6-AA1FDB25EA46}" type="datetimeFigureOut">
               <a:rPr kumimoji="1" lang="ja-JP" altLang="en-US" smtClean="0"/>
               <a:t>2026/7/30</a:t>
             </a:fld>
@@ -3208,7 +3208,7 @@
           <p:cNvPr id="5" name="フッター プレースホルダー 4">
             <a:extLst>
               <a:ext uri="{FF2B5EF4-FFF2-40B4-BE49-F238E27FC236}">
-                <a16:creationId xmlns:a16="http://schemas.microsoft.com/office/drawing/2014/main" id="{4551151C-F92B-893A-F4E9-1F7AE7BC68F8}"/>
+                <a16:creationId xmlns:a16="http://schemas.microsoft.com/office/drawing/2014/main" id="{0B8FA64E-EF76-5C18-30F0-EA5CD77D2CA5}"/>
               </a:ext>
             </a:extLst>
           </p:cNvPr>
@@ -3251,7 +3251,7 @@
           <p:cNvPr id="6" name="スライド番号プレースホルダー 5">
             <a:extLst>
               <a:ext uri="{FF2B5EF4-FFF2-40B4-BE49-F238E27FC236}">
-                <a16:creationId xmlns:a16="http://schemas.microsoft.com/office/drawing/2014/main" id="{9E4630E8-6A9E-F270-7ABA-79891BF54F88}"/>
+                <a16:creationId xmlns:a16="http://schemas.microsoft.com/office/drawing/2014/main" id="{7AF03C55-4742-1CCA-575B-22A397A0CF2B}"/>
               </a:ext>
             </a:extLst>
           </p:cNvPr>
@@ -3285,7 +3285,7 @@
             </a:lvl1pPr>
           </a:lstStyle>
           <a:p>
-            <a:fld id="{6E13900F-BFE2-4005-B230-CC316F86FDEE}" type="slidenum">
+            <a:fld id="{81FD5278-7AEE-471E-A031-8249E2F16060}" type="slidenum">
               <a:rPr kumimoji="1" lang="ja-JP" altLang="en-US" smtClean="0"/>
               <a:t>‹#›</a:t>
             </a:fld>
@@ -3296,7 +3296,7 @@
     </p:spTree>
     <p:extLst>
       <p:ext uri="{BB962C8B-B14F-4D97-AF65-F5344CB8AC3E}">
-        <p14:creationId xmlns:p14="http://schemas.microsoft.com/office/powerpoint/2010/main" val="3512317633"/>
+        <p14:creationId xmlns:p14="http://schemas.microsoft.com/office/powerpoint/2010/main" val="2890915154"/>
       </p:ext>
     </p:extLst>
   </p:cSld>
@@ -3619,7 +3619,7 @@
           <p:cNvPr id="2" name="テキスト ボックス 1">
             <a:extLst>
               <a:ext uri="{FF2B5EF4-FFF2-40B4-BE49-F238E27FC236}">
-                <a16:creationId xmlns:a16="http://schemas.microsoft.com/office/drawing/2014/main" id="{41E17B4D-EDA6-C7A6-4C92-2136F8B8E6E5}"/>
+                <a16:creationId xmlns:a16="http://schemas.microsoft.com/office/drawing/2014/main" id="{18A79CCD-25DF-3E59-3780-BFAAA5B9541D}"/>
               </a:ext>
             </a:extLst>
           </p:cNvPr>
@@ -3665,7 +3665,7 @@
           <p:cNvPr id="3" name="テキスト ボックス 2">
             <a:extLst>
               <a:ext uri="{FF2B5EF4-FFF2-40B4-BE49-F238E27FC236}">
-                <a16:creationId xmlns:a16="http://schemas.microsoft.com/office/drawing/2014/main" id="{549CA3B5-B97B-C99E-CDDA-6AB807DC98D4}"/>
+                <a16:creationId xmlns:a16="http://schemas.microsoft.com/office/drawing/2014/main" id="{7213118F-A527-868A-EF32-709755055B50}"/>
               </a:ext>
             </a:extLst>
           </p:cNvPr>
@@ -3714,7 +3714,7 @@
           <p:cNvPr id="4" name="テキスト ボックス 3">
             <a:extLst>
               <a:ext uri="{FF2B5EF4-FFF2-40B4-BE49-F238E27FC236}">
-                <a16:creationId xmlns:a16="http://schemas.microsoft.com/office/drawing/2014/main" id="{50FCB3DA-3BD8-176D-3FF5-353F83E7B0A9}"/>
+                <a16:creationId xmlns:a16="http://schemas.microsoft.com/office/drawing/2014/main" id="{DB369961-9A33-BB0B-C22A-9710548794DA}"/>
               </a:ext>
             </a:extLst>
           </p:cNvPr>
@@ -3754,7 +3754,7 @@
           <p:cNvPr id="5" name="テキスト ボックス 4">
             <a:extLst>
               <a:ext uri="{FF2B5EF4-FFF2-40B4-BE49-F238E27FC236}">
-                <a16:creationId xmlns:a16="http://schemas.microsoft.com/office/drawing/2014/main" id="{75FD3798-A9A6-F10A-A3EF-1F4F782DA3EB}"/>
+                <a16:creationId xmlns:a16="http://schemas.microsoft.com/office/drawing/2014/main" id="{003049EE-A11E-8A9C-D404-FD61D6C04EDC}"/>
               </a:ext>
             </a:extLst>
           </p:cNvPr>
@@ -3801,7 +3801,7 @@
             <a:hlinkClick r:id="" action="ppaction://media"/>
             <a:extLst>
               <a:ext uri="{FF2B5EF4-FFF2-40B4-BE49-F238E27FC236}">
-                <a16:creationId xmlns:a16="http://schemas.microsoft.com/office/drawing/2014/main" id="{7689523F-C407-F84C-F623-D449E868F1E7}"/>
+                <a16:creationId xmlns:a16="http://schemas.microsoft.com/office/drawing/2014/main" id="{095D15FE-CB21-2B3D-BBD8-9D8A10D2130A}"/>
               </a:ext>
             </a:extLst>
           </p:cNvPr>
@@ -3836,7 +3836,7 @@
     </p:spTree>
     <p:extLst>
       <p:ext uri="{BB962C8B-B14F-4D97-AF65-F5344CB8AC3E}">
-        <p14:creationId xmlns:p14="http://schemas.microsoft.com/office/powerpoint/2010/main" val="201714418"/>
+        <p14:creationId xmlns:p14="http://schemas.microsoft.com/office/powerpoint/2010/main" val="2792420158"/>
       </p:ext>
     </p:extLst>
   </p:cSld>
@@ -3960,7 +3960,7 @@
           <p:cNvPr id="2" name="テキスト ボックス 1">
             <a:extLst>
               <a:ext uri="{FF2B5EF4-FFF2-40B4-BE49-F238E27FC236}">
-                <a16:creationId xmlns:a16="http://schemas.microsoft.com/office/drawing/2014/main" id="{2A057658-117B-E9EB-62E5-D34B5DF1E34A}"/>
+                <a16:creationId xmlns:a16="http://schemas.microsoft.com/office/drawing/2014/main" id="{1D9E8014-9EC8-EEA2-BF0D-B62EDF7F4F43}"/>
               </a:ext>
             </a:extLst>
           </p:cNvPr>
@@ -4006,7 +4006,7 @@
           <p:cNvPr id="3" name="テキスト ボックス 2">
             <a:extLst>
               <a:ext uri="{FF2B5EF4-FFF2-40B4-BE49-F238E27FC236}">
-                <a16:creationId xmlns:a16="http://schemas.microsoft.com/office/drawing/2014/main" id="{68D9FBAC-622F-71F6-8C85-3359BA66C3F7}"/>
+                <a16:creationId xmlns:a16="http://schemas.microsoft.com/office/drawing/2014/main" id="{DBD56ABA-C52D-4F8F-A843-9008CAB52835}"/>
               </a:ext>
             </a:extLst>
           </p:cNvPr>
@@ -4046,7 +4046,7 @@
           <p:cNvPr id="4" name="テキスト ボックス 3">
             <a:extLst>
               <a:ext uri="{FF2B5EF4-FFF2-40B4-BE49-F238E27FC236}">
-                <a16:creationId xmlns:a16="http://schemas.microsoft.com/office/drawing/2014/main" id="{B9C866F8-770E-B92F-B2C5-C49C11C48A3C}"/>
+                <a16:creationId xmlns:a16="http://schemas.microsoft.com/office/drawing/2014/main" id="{7B6BADEF-31D6-B5BF-C453-BE8A7D122C4A}"/>
               </a:ext>
             </a:extLst>
           </p:cNvPr>
@@ -4095,7 +4095,7 @@
           <p:cNvPr id="5" name="テキスト ボックス 4">
             <a:extLst>
               <a:ext uri="{FF2B5EF4-FFF2-40B4-BE49-F238E27FC236}">
-                <a16:creationId xmlns:a16="http://schemas.microsoft.com/office/drawing/2014/main" id="{BE15CB96-462D-E007-4705-F05B88DF0D79}"/>
+                <a16:creationId xmlns:a16="http://schemas.microsoft.com/office/drawing/2014/main" id="{3088A90A-1A3C-AD21-3B16-C2156B637AF3}"/>
               </a:ext>
             </a:extLst>
           </p:cNvPr>
@@ -4142,7 +4142,7 @@
             <a:hlinkClick r:id="" action="ppaction://media"/>
             <a:extLst>
               <a:ext uri="{FF2B5EF4-FFF2-40B4-BE49-F238E27FC236}">
-                <a16:creationId xmlns:a16="http://schemas.microsoft.com/office/drawing/2014/main" id="{B6E96E2C-6E65-4043-1024-C28969B58156}"/>
+                <a16:creationId xmlns:a16="http://schemas.microsoft.com/office/drawing/2014/main" id="{71B1D72D-F67C-61CC-CCD2-5301B0C980D5}"/>
               </a:ext>
             </a:extLst>
           </p:cNvPr>
@@ -4177,7 +4177,7 @@
     </p:spTree>
     <p:extLst>
       <p:ext uri="{BB962C8B-B14F-4D97-AF65-F5344CB8AC3E}">
-        <p14:creationId xmlns:p14="http://schemas.microsoft.com/office/powerpoint/2010/main" val="941799048"/>
+        <p14:creationId xmlns:p14="http://schemas.microsoft.com/office/powerpoint/2010/main" val="4186981400"/>
       </p:ext>
     </p:extLst>
   </p:cSld>
@@ -4301,7 +4301,7 @@
           <p:cNvPr id="2" name="テキスト ボックス 1">
             <a:extLst>
               <a:ext uri="{FF2B5EF4-FFF2-40B4-BE49-F238E27FC236}">
-                <a16:creationId xmlns:a16="http://schemas.microsoft.com/office/drawing/2014/main" id="{1BBA8E36-918F-CE06-0A61-BE757F9814E1}"/>
+                <a16:creationId xmlns:a16="http://schemas.microsoft.com/office/drawing/2014/main" id="{238433DA-AEB1-808D-FFFA-0238F806CA5B}"/>
               </a:ext>
             </a:extLst>
           </p:cNvPr>
@@ -4347,7 +4347,7 @@
           <p:cNvPr id="3" name="テキスト ボックス 2">
             <a:extLst>
               <a:ext uri="{FF2B5EF4-FFF2-40B4-BE49-F238E27FC236}">
-                <a16:creationId xmlns:a16="http://schemas.microsoft.com/office/drawing/2014/main" id="{3D597C5F-0555-34C3-B57C-157329A6877E}"/>
+                <a16:creationId xmlns:a16="http://schemas.microsoft.com/office/drawing/2014/main" id="{37EB3C15-91A4-BCA7-2686-72DE6E244577}"/>
               </a:ext>
             </a:extLst>
           </p:cNvPr>
@@ -4387,7 +4387,7 @@
           <p:cNvPr id="4" name="テキスト ボックス 3">
             <a:extLst>
               <a:ext uri="{FF2B5EF4-FFF2-40B4-BE49-F238E27FC236}">
-                <a16:creationId xmlns:a16="http://schemas.microsoft.com/office/drawing/2014/main" id="{88BE9E59-8D4B-C12E-C5FD-73C001839E6C}"/>
+                <a16:creationId xmlns:a16="http://schemas.microsoft.com/office/drawing/2014/main" id="{3D2CC3A5-F52D-65F4-32D0-FDD0E78844C8}"/>
               </a:ext>
             </a:extLst>
           </p:cNvPr>
@@ -4482,7 +4482,7 @@
           <p:cNvPr id="5" name="テキスト ボックス 4">
             <a:extLst>
               <a:ext uri="{FF2B5EF4-FFF2-40B4-BE49-F238E27FC236}">
-                <a16:creationId xmlns:a16="http://schemas.microsoft.com/office/drawing/2014/main" id="{D37E38D6-3CDD-9283-7A2F-ABC8BDB32EC8}"/>
+                <a16:creationId xmlns:a16="http://schemas.microsoft.com/office/drawing/2014/main" id="{1EC53816-457F-3B44-DB75-DFE0009D6C59}"/>
               </a:ext>
             </a:extLst>
           </p:cNvPr>
@@ -4529,7 +4529,7 @@
             <a:hlinkClick r:id="" action="ppaction://media"/>
             <a:extLst>
               <a:ext uri="{FF2B5EF4-FFF2-40B4-BE49-F238E27FC236}">
-                <a16:creationId xmlns:a16="http://schemas.microsoft.com/office/drawing/2014/main" id="{01E6F2CA-20F5-ED97-D424-08EDC0026616}"/>
+                <a16:creationId xmlns:a16="http://schemas.microsoft.com/office/drawing/2014/main" id="{38B09833-A0AE-03A5-25ED-B0916335068D}"/>
               </a:ext>
             </a:extLst>
           </p:cNvPr>
@@ -4564,7 +4564,7 @@
     </p:spTree>
     <p:extLst>
       <p:ext uri="{BB962C8B-B14F-4D97-AF65-F5344CB8AC3E}">
-        <p14:creationId xmlns:p14="http://schemas.microsoft.com/office/powerpoint/2010/main" val="1476854289"/>
+        <p14:creationId xmlns:p14="http://schemas.microsoft.com/office/powerpoint/2010/main" val="1866979462"/>
       </p:ext>
     </p:extLst>
   </p:cSld>
@@ -4688,7 +4688,7 @@
           <p:cNvPr id="2" name="テキスト ボックス 1">
             <a:extLst>
               <a:ext uri="{FF2B5EF4-FFF2-40B4-BE49-F238E27FC236}">
-                <a16:creationId xmlns:a16="http://schemas.microsoft.com/office/drawing/2014/main" id="{A93B4AF8-7CFD-AE1C-A49E-B41AEE23FBD7}"/>
+                <a16:creationId xmlns:a16="http://schemas.microsoft.com/office/drawing/2014/main" id="{8443D35B-7AF9-48CA-50C4-D8B258494554}"/>
               </a:ext>
             </a:extLst>
           </p:cNvPr>
@@ -4734,7 +4734,7 @@
           <p:cNvPr id="3" name="テキスト ボックス 2">
             <a:extLst>
               <a:ext uri="{FF2B5EF4-FFF2-40B4-BE49-F238E27FC236}">
-                <a16:creationId xmlns:a16="http://schemas.microsoft.com/office/drawing/2014/main" id="{6AE4FBF1-6BB1-6D22-80AB-5B70A8002241}"/>
+                <a16:creationId xmlns:a16="http://schemas.microsoft.com/office/drawing/2014/main" id="{642C0525-51C8-DC58-7441-220C98C81BFF}"/>
               </a:ext>
             </a:extLst>
           </p:cNvPr>
@@ -4774,7 +4774,7 @@
           <p:cNvPr id="4" name="テキスト ボックス 3">
             <a:extLst>
               <a:ext uri="{FF2B5EF4-FFF2-40B4-BE49-F238E27FC236}">
-                <a16:creationId xmlns:a16="http://schemas.microsoft.com/office/drawing/2014/main" id="{2B2D573C-8B39-31B6-86F7-D2059BE40546}"/>
+                <a16:creationId xmlns:a16="http://schemas.microsoft.com/office/drawing/2014/main" id="{B874AD28-7674-EAD9-0F71-5B9E557B1975}"/>
               </a:ext>
             </a:extLst>
           </p:cNvPr>
@@ -4884,7 +4884,7 @@
           <p:cNvPr id="5" name="テキスト ボックス 4">
             <a:extLst>
               <a:ext uri="{FF2B5EF4-FFF2-40B4-BE49-F238E27FC236}">
-                <a16:creationId xmlns:a16="http://schemas.microsoft.com/office/drawing/2014/main" id="{79026891-3F7F-206B-72E7-21B775BBC9BB}"/>
+                <a16:creationId xmlns:a16="http://schemas.microsoft.com/office/drawing/2014/main" id="{BB33F4EB-252F-8A9F-03A3-A474A59AD22D}"/>
               </a:ext>
             </a:extLst>
           </p:cNvPr>
@@ -4931,7 +4931,7 @@
             <a:hlinkClick r:id="" action="ppaction://media"/>
             <a:extLst>
               <a:ext uri="{FF2B5EF4-FFF2-40B4-BE49-F238E27FC236}">
-                <a16:creationId xmlns:a16="http://schemas.microsoft.com/office/drawing/2014/main" id="{4FC4B470-7671-1F5A-A87D-1CC993ADB343}"/>
+                <a16:creationId xmlns:a16="http://schemas.microsoft.com/office/drawing/2014/main" id="{3879B8FD-F326-E526-B098-51B8E08B1D11}"/>
               </a:ext>
             </a:extLst>
           </p:cNvPr>
@@ -4966,7 +4966,7 @@
     </p:spTree>
     <p:extLst>
       <p:ext uri="{BB962C8B-B14F-4D97-AF65-F5344CB8AC3E}">
-        <p14:creationId xmlns:p14="http://schemas.microsoft.com/office/powerpoint/2010/main" val="2414284383"/>
+        <p14:creationId xmlns:p14="http://schemas.microsoft.com/office/powerpoint/2010/main" val="2087304347"/>
       </p:ext>
     </p:extLst>
   </p:cSld>
@@ -5090,7 +5090,7 @@
           <p:cNvPr id="2" name="テキスト ボックス 1">
             <a:extLst>
               <a:ext uri="{FF2B5EF4-FFF2-40B4-BE49-F238E27FC236}">
-                <a16:creationId xmlns:a16="http://schemas.microsoft.com/office/drawing/2014/main" id="{72BCF837-074C-DDDA-42DB-35401A55BE15}"/>
+                <a16:creationId xmlns:a16="http://schemas.microsoft.com/office/drawing/2014/main" id="{6A532A61-E910-CCEB-9935-8487732D4051}"/>
               </a:ext>
             </a:extLst>
           </p:cNvPr>
@@ -5136,7 +5136,7 @@
           <p:cNvPr id="3" name="テキスト ボックス 2">
             <a:extLst>
               <a:ext uri="{FF2B5EF4-FFF2-40B4-BE49-F238E27FC236}">
-                <a16:creationId xmlns:a16="http://schemas.microsoft.com/office/drawing/2014/main" id="{28559E65-F9D2-D203-85D3-9FB4BDDA35F7}"/>
+                <a16:creationId xmlns:a16="http://schemas.microsoft.com/office/drawing/2014/main" id="{01E7B7D1-4E60-03A7-82FC-4163E2C2F269}"/>
               </a:ext>
             </a:extLst>
           </p:cNvPr>
@@ -5176,7 +5176,7 @@
           <p:cNvPr id="4" name="テキスト ボックス 3">
             <a:extLst>
               <a:ext uri="{FF2B5EF4-FFF2-40B4-BE49-F238E27FC236}">
-                <a16:creationId xmlns:a16="http://schemas.microsoft.com/office/drawing/2014/main" id="{34A816D2-CCD0-0376-4170-CD7BD0BA55E2}"/>
+                <a16:creationId xmlns:a16="http://schemas.microsoft.com/office/drawing/2014/main" id="{C1859203-EA87-0BC7-D989-F03F06F860A3}"/>
               </a:ext>
             </a:extLst>
           </p:cNvPr>
@@ -5200,20 +5200,14 @@
           <a:lstStyle/>
           <a:p>
             <a:r>
-              <a:rPr kumimoji="1" lang="en-US" altLang="ja-JP" sz="2000">
+              <a:rPr kumimoji="1" lang="ja-JP" altLang="en-US" sz="2000">
                 <a:solidFill>
                   <a:srgbClr val="333333"/>
                 </a:solidFill>
                 <a:latin typeface="Arial" panose="020B0604020202020204" pitchFamily="34" charset="0"/>
               </a:rPr>
-              <a:t>Add SEO UGC and monetization strategy</a:t>
-            </a:r>
-            <a:endParaRPr kumimoji="1" lang="ja-JP" altLang="en-US" sz="2000">
-              <a:solidFill>
-                <a:srgbClr val="333333"/>
-              </a:solidFill>
-              <a:latin typeface="Arial" panose="020B0604020202020204" pitchFamily="34" charset="0"/>
-            </a:endParaRPr>
+              <a:t>直近のコミットでは、新機能の追加と実装強化が行われました。</a:t>
+            </a:r>
           </a:p>
         </p:txBody>
       </p:sp>
@@ -5222,7 +5216,7 @@
           <p:cNvPr id="5" name="テキスト ボックス 4">
             <a:extLst>
               <a:ext uri="{FF2B5EF4-FFF2-40B4-BE49-F238E27FC236}">
-                <a16:creationId xmlns:a16="http://schemas.microsoft.com/office/drawing/2014/main" id="{5E706C06-DA3B-EDD8-D2AC-492CC5A65C11}"/>
+                <a16:creationId xmlns:a16="http://schemas.microsoft.com/office/drawing/2014/main" id="{EE664CC4-8076-E0FC-0D10-94FF798AE6DC}"/>
               </a:ext>
             </a:extLst>
           </p:cNvPr>
@@ -5269,7 +5263,7 @@
             <a:hlinkClick r:id="" action="ppaction://media"/>
             <a:extLst>
               <a:ext uri="{FF2B5EF4-FFF2-40B4-BE49-F238E27FC236}">
-                <a16:creationId xmlns:a16="http://schemas.microsoft.com/office/drawing/2014/main" id="{8A416438-64EB-82BE-99FE-901E98D2C03C}"/>
+                <a16:creationId xmlns:a16="http://schemas.microsoft.com/office/drawing/2014/main" id="{47B9043E-5F39-637C-D7DA-4DA2BF0D3DBA}"/>
               </a:ext>
             </a:extLst>
           </p:cNvPr>
@@ -5304,7 +5298,7 @@
     </p:spTree>
     <p:extLst>
       <p:ext uri="{BB962C8B-B14F-4D97-AF65-F5344CB8AC3E}">
-        <p14:creationId xmlns:p14="http://schemas.microsoft.com/office/powerpoint/2010/main" val="1885712699"/>
+        <p14:creationId xmlns:p14="http://schemas.microsoft.com/office/powerpoint/2010/main" val="3461105427"/>
       </p:ext>
     </p:extLst>
   </p:cSld>
@@ -5313,10 +5307,10 @@
   </p:clrMapOvr>
   <mc:AlternateContent xmlns:mc="http://schemas.openxmlformats.org/markup-compatibility/2006">
     <mc:Choice xmlns:p14="http://schemas.microsoft.com/office/powerpoint/2010/main" Requires="p14">
-      <p:transition spd="slow" p14:dur="2000" advTm="9000"/>
+      <p:transition spd="slow" p14:dur="2000" advTm="6000"/>
     </mc:Choice>
     <mc:Fallback>
-      <p:transition spd="slow" advTm="9000"/>
+      <p:transition spd="slow" advTm="6000"/>
     </mc:Fallback>
   </mc:AlternateContent>
   <p:timing>
@@ -5347,7 +5341,7 @@
                                   <p:childTnLst>
                                     <p:cmd type="call" cmd="playFrom(0.0)">
                                       <p:cBhvr>
-                                        <p:cTn id="6" dur="8026" fill="hold"/>
+                                        <p:cTn id="6" dur="5687" fill="hold"/>
                                         <p:tgtEl>
                                           <p:spTgt spid="6"/>
                                         </p:tgtEl>
@@ -5428,7 +5422,7 @@
           <p:cNvPr id="2" name="テキスト ボックス 1">
             <a:extLst>
               <a:ext uri="{FF2B5EF4-FFF2-40B4-BE49-F238E27FC236}">
-                <a16:creationId xmlns:a16="http://schemas.microsoft.com/office/drawing/2014/main" id="{2F207EB1-4389-7065-DF7E-F9D11F16F278}"/>
+                <a16:creationId xmlns:a16="http://schemas.microsoft.com/office/drawing/2014/main" id="{4858EFC9-FBB5-D244-0699-8B76F9E40828}"/>
               </a:ext>
             </a:extLst>
           </p:cNvPr>
@@ -5474,7 +5468,7 @@
           <p:cNvPr id="3" name="テキスト ボックス 2">
             <a:extLst>
               <a:ext uri="{FF2B5EF4-FFF2-40B4-BE49-F238E27FC236}">
-                <a16:creationId xmlns:a16="http://schemas.microsoft.com/office/drawing/2014/main" id="{6C62AA53-5840-5DEC-777D-724FB568864C}"/>
+                <a16:creationId xmlns:a16="http://schemas.microsoft.com/office/drawing/2014/main" id="{24CCCE60-9731-E45A-8866-4A7109FE84FD}"/>
               </a:ext>
             </a:extLst>
           </p:cNvPr>
@@ -5514,7 +5508,7 @@
           <p:cNvPr id="4" name="テキスト ボックス 3">
             <a:extLst>
               <a:ext uri="{FF2B5EF4-FFF2-40B4-BE49-F238E27FC236}">
-                <a16:creationId xmlns:a16="http://schemas.microsoft.com/office/drawing/2014/main" id="{D2129B4C-7DB0-D5F7-B31D-E0F3637A074C}"/>
+                <a16:creationId xmlns:a16="http://schemas.microsoft.com/office/drawing/2014/main" id="{8ACA1E08-1F69-8855-4DCE-C439676D4287}"/>
               </a:ext>
             </a:extLst>
           </p:cNvPr>
@@ -5579,7 +5573,7 @@
           <p:cNvPr id="5" name="テキスト ボックス 4">
             <a:extLst>
               <a:ext uri="{FF2B5EF4-FFF2-40B4-BE49-F238E27FC236}">
-                <a16:creationId xmlns:a16="http://schemas.microsoft.com/office/drawing/2014/main" id="{34A00FB3-1CCB-C0CD-3118-2DC4C0B2D967}"/>
+                <a16:creationId xmlns:a16="http://schemas.microsoft.com/office/drawing/2014/main" id="{DFA434F2-009C-91C1-3481-98F227CE8E22}"/>
               </a:ext>
             </a:extLst>
           </p:cNvPr>
@@ -5626,7 +5620,7 @@
             <a:hlinkClick r:id="" action="ppaction://media"/>
             <a:extLst>
               <a:ext uri="{FF2B5EF4-FFF2-40B4-BE49-F238E27FC236}">
-                <a16:creationId xmlns:a16="http://schemas.microsoft.com/office/drawing/2014/main" id="{FF983634-17A5-DC73-6EED-6B78AC0E5F39}"/>
+                <a16:creationId xmlns:a16="http://schemas.microsoft.com/office/drawing/2014/main" id="{CB2FBC0A-EFD8-FF71-CA75-C073A5F9F8BD}"/>
               </a:ext>
             </a:extLst>
           </p:cNvPr>
@@ -5661,7 +5655,7 @@
     </p:spTree>
     <p:extLst>
       <p:ext uri="{BB962C8B-B14F-4D97-AF65-F5344CB8AC3E}">
-        <p14:creationId xmlns:p14="http://schemas.microsoft.com/office/powerpoint/2010/main" val="4225370115"/>
+        <p14:creationId xmlns:p14="http://schemas.microsoft.com/office/powerpoint/2010/main" val="287361990"/>
       </p:ext>
     </p:extLst>
   </p:cSld>
